--- a/.claude/skills/frontier-commons/examples/decks/sample-deck.pptx
+++ b/.claude/skills/frontier-commons/examples/decks/sample-deck.pptx
@@ -8553,7 +8553,7 @@
       <p:grpSpPr/>
       <p:pic>
         <p:nvPicPr>
-          <p:cNvPr id="2" name="Picture 1" descr="img_7779578196235541241.png"/>
+          <p:cNvPr id="2" name="Picture 1" descr="img_1681773242970499280.png"/>
           <p:cNvPicPr>
             <a:picLocks noChangeAspect="1"/>
           </p:cNvPicPr>
